--- a/VirtualLab_MatLab/apps/images/Nuovo Presentazione di Microsoft PowerPoint.pptx
+++ b/VirtualLab_MatLab/apps/images/Nuovo Presentazione di Microsoft PowerPoint.pptx
@@ -6,6 +6,7 @@
   </p:sldMasterIdLst>
   <p:sldIdLst>
     <p:sldId id="256" r:id="rId2"/>
+    <p:sldId id="257" r:id="rId3"/>
   </p:sldIdLst>
   <p:sldSz cx="12192000" cy="6858000"/>
   <p:notesSz cx="6858000" cy="9144000"/>
@@ -104,13 +105,18 @@
       </a:defRPr>
     </a:lvl9pPr>
   </p:defaultTextStyle>
+  <p:extLst>
+    <p:ext uri="{EFAFB233-063F-42B5-8137-9DF3F51BA10A}">
+      <p15:sldGuideLst xmlns:p15="http://schemas.microsoft.com/office/powerpoint/2012/main"/>
+    </p:ext>
+  </p:extLst>
 </p:presentation>
 </file>
 
 <file path=ppt/revisionInfo.xml><?xml version="1.0" encoding="utf-8"?>
 <p1510:revInfo xmlns:a="http://schemas.openxmlformats.org/drawingml/2006/main" xmlns:r="http://schemas.openxmlformats.org/officeDocument/2006/relationships" xmlns:p1510="http://schemas.microsoft.com/office/powerpoint/2015/10/main">
   <p1510:revLst>
-    <p1510:client id="{CF5088BA-220D-4B9B-A0D2-3A382E7A9635}" v="1" dt="2025-11-04T10:50:51.445"/>
+    <p1510:client id="{E58BCE0F-8541-4450-B4CE-2435831894A3}" v="3" dt="2026-03-11T09:50:54.349"/>
   </p1510:revLst>
 </p1510:revInfo>
 </file>
@@ -120,38 +126,62 @@
   <pc:docChgLst>
     <pc:chgData name="Riccardo Rossi" userId="cfd7839ca6e772a1" providerId="LiveId" clId="{0E3C05C9-8BC9-4930-92EB-EEBFDADE429C}"/>
     <pc:docChg chg="custSel addSld modSld">
-      <pc:chgData name="Riccardo Rossi" userId="cfd7839ca6e772a1" providerId="LiveId" clId="{0E3C05C9-8BC9-4930-92EB-EEBFDADE429C}" dt="2025-11-04T10:50:56.134" v="6" actId="1076"/>
+      <pc:chgData name="Riccardo Rossi" userId="cfd7839ca6e772a1" providerId="LiveId" clId="{0E3C05C9-8BC9-4930-92EB-EEBFDADE429C}" dt="2026-03-11T09:50:54.349" v="27" actId="165"/>
       <pc:docMkLst>
         <pc:docMk/>
       </pc:docMkLst>
       <pc:sldChg chg="addSp delSp modSp new mod">
-        <pc:chgData name="Riccardo Rossi" userId="cfd7839ca6e772a1" providerId="LiveId" clId="{0E3C05C9-8BC9-4930-92EB-EEBFDADE429C}" dt="2025-11-04T10:50:56.134" v="6" actId="1076"/>
+        <pc:chgData name="Riccardo Rossi" userId="cfd7839ca6e772a1" providerId="LiveId" clId="{0E3C05C9-8BC9-4930-92EB-EEBFDADE429C}" dt="2026-03-11T09:50:54.349" v="27" actId="165"/>
         <pc:sldMkLst>
           <pc:docMk/>
-          <pc:sldMk cId="3513293688" sldId="256"/>
+          <pc:sldMk cId="3010427344" sldId="257"/>
         </pc:sldMkLst>
         <pc:spChg chg="del">
-          <ac:chgData name="Riccardo Rossi" userId="cfd7839ca6e772a1" providerId="LiveId" clId="{0E3C05C9-8BC9-4930-92EB-EEBFDADE429C}" dt="2025-11-04T10:50:48.854" v="1" actId="478"/>
+          <ac:chgData name="Riccardo Rossi" userId="cfd7839ca6e772a1" providerId="LiveId" clId="{0E3C05C9-8BC9-4930-92EB-EEBFDADE429C}" dt="2026-03-11T09:45:44.917" v="8" actId="478"/>
           <ac:spMkLst>
             <pc:docMk/>
-            <pc:sldMk cId="3513293688" sldId="256"/>
-            <ac:spMk id="2" creationId="{8D24690C-3F9A-EDA6-08AA-B41469FEF721}"/>
+            <pc:sldMk cId="3010427344" sldId="257"/>
+            <ac:spMk id="2" creationId="{50D8F504-F554-0BA7-23A3-1EADBB8E4A00}"/>
           </ac:spMkLst>
         </pc:spChg>
         <pc:spChg chg="del">
-          <ac:chgData name="Riccardo Rossi" userId="cfd7839ca6e772a1" providerId="LiveId" clId="{0E3C05C9-8BC9-4930-92EB-EEBFDADE429C}" dt="2025-11-04T10:50:48.854" v="1" actId="478"/>
+          <ac:chgData name="Riccardo Rossi" userId="cfd7839ca6e772a1" providerId="LiveId" clId="{0E3C05C9-8BC9-4930-92EB-EEBFDADE429C}" dt="2026-03-11T09:45:44.917" v="8" actId="478"/>
           <ac:spMkLst>
             <pc:docMk/>
-            <pc:sldMk cId="3513293688" sldId="256"/>
-            <ac:spMk id="3" creationId="{71A1577A-A3DF-FC25-7F1A-1EEE2A94D4C5}"/>
+            <pc:sldMk cId="3010427344" sldId="257"/>
+            <ac:spMk id="3" creationId="{AB28A57D-A320-69EF-3B0B-0741EDC511E2}"/>
           </ac:spMkLst>
         </pc:spChg>
-        <pc:picChg chg="add mod modCrop">
-          <ac:chgData name="Riccardo Rossi" userId="cfd7839ca6e772a1" providerId="LiveId" clId="{0E3C05C9-8BC9-4930-92EB-EEBFDADE429C}" dt="2025-11-04T10:50:56.134" v="6" actId="1076"/>
+        <pc:spChg chg="add del mod">
+          <ac:chgData name="Riccardo Rossi" userId="cfd7839ca6e772a1" providerId="LiveId" clId="{0E3C05C9-8BC9-4930-92EB-EEBFDADE429C}" dt="2026-03-11T09:45:49.996" v="11"/>
+          <ac:spMkLst>
+            <pc:docMk/>
+            <pc:sldMk cId="3010427344" sldId="257"/>
+            <ac:spMk id="4" creationId="{580F4279-77BE-70CD-6F7A-A0D1E17BD0A9}"/>
+          </ac:spMkLst>
+        </pc:spChg>
+        <pc:spChg chg="add mod topLvl">
+          <ac:chgData name="Riccardo Rossi" userId="cfd7839ca6e772a1" providerId="LiveId" clId="{0E3C05C9-8BC9-4930-92EB-EEBFDADE429C}" dt="2026-03-11T09:50:54.349" v="27" actId="165"/>
+          <ac:spMkLst>
+            <pc:docMk/>
+            <pc:sldMk cId="3010427344" sldId="257"/>
+            <ac:spMk id="5" creationId="{DCC51DEA-F9EE-FE35-C59B-5F164BA123A3}"/>
+          </ac:spMkLst>
+        </pc:spChg>
+        <pc:grpChg chg="add del mod">
+          <ac:chgData name="Riccardo Rossi" userId="cfd7839ca6e772a1" providerId="LiveId" clId="{0E3C05C9-8BC9-4930-92EB-EEBFDADE429C}" dt="2026-03-11T09:50:54.349" v="27" actId="165"/>
+          <ac:grpSpMkLst>
+            <pc:docMk/>
+            <pc:sldMk cId="3010427344" sldId="257"/>
+            <ac:grpSpMk id="8" creationId="{A449EC3F-C6D5-E99B-7126-4A0726E3C20B}"/>
+          </ac:grpSpMkLst>
+        </pc:grpChg>
+        <pc:picChg chg="add mod topLvl modCrop">
+          <ac:chgData name="Riccardo Rossi" userId="cfd7839ca6e772a1" providerId="LiveId" clId="{0E3C05C9-8BC9-4930-92EB-EEBFDADE429C}" dt="2026-03-11T09:50:54.349" v="27" actId="165"/>
           <ac:picMkLst>
             <pc:docMk/>
-            <pc:sldMk cId="3513293688" sldId="256"/>
-            <ac:picMk id="5" creationId="{38EC974B-7051-8EA6-55BB-8911E48405DC}"/>
+            <pc:sldMk cId="3010427344" sldId="257"/>
+            <ac:picMk id="7" creationId="{CAEC6B87-E173-5689-A772-5C9288EBDFFF}"/>
           </ac:picMkLst>
         </pc:picChg>
       </pc:sldChg>
@@ -307,7 +337,7 @@
           <a:p>
             <a:fld id="{57D77E67-7B3D-4818-8C13-CD2889832A7C}" type="datetimeFigureOut">
               <a:rPr lang="it-IT" smtClean="0"/>
-              <a:t>04/11/2025</a:t>
+              <a:t>11/03/2026</a:t>
             </a:fld>
             <a:endParaRPr lang="it-IT"/>
           </a:p>
@@ -505,7 +535,7 @@
           <a:p>
             <a:fld id="{57D77E67-7B3D-4818-8C13-CD2889832A7C}" type="datetimeFigureOut">
               <a:rPr lang="it-IT" smtClean="0"/>
-              <a:t>04/11/2025</a:t>
+              <a:t>11/03/2026</a:t>
             </a:fld>
             <a:endParaRPr lang="it-IT"/>
           </a:p>
@@ -713,7 +743,7 @@
           <a:p>
             <a:fld id="{57D77E67-7B3D-4818-8C13-CD2889832A7C}" type="datetimeFigureOut">
               <a:rPr lang="it-IT" smtClean="0"/>
-              <a:t>04/11/2025</a:t>
+              <a:t>11/03/2026</a:t>
             </a:fld>
             <a:endParaRPr lang="it-IT"/>
           </a:p>
@@ -911,7 +941,7 @@
           <a:p>
             <a:fld id="{57D77E67-7B3D-4818-8C13-CD2889832A7C}" type="datetimeFigureOut">
               <a:rPr lang="it-IT" smtClean="0"/>
-              <a:t>04/11/2025</a:t>
+              <a:t>11/03/2026</a:t>
             </a:fld>
             <a:endParaRPr lang="it-IT"/>
           </a:p>
@@ -1186,7 +1216,7 @@
           <a:p>
             <a:fld id="{57D77E67-7B3D-4818-8C13-CD2889832A7C}" type="datetimeFigureOut">
               <a:rPr lang="it-IT" smtClean="0"/>
-              <a:t>04/11/2025</a:t>
+              <a:t>11/03/2026</a:t>
             </a:fld>
             <a:endParaRPr lang="it-IT"/>
           </a:p>
@@ -1451,7 +1481,7 @@
           <a:p>
             <a:fld id="{57D77E67-7B3D-4818-8C13-CD2889832A7C}" type="datetimeFigureOut">
               <a:rPr lang="it-IT" smtClean="0"/>
-              <a:t>04/11/2025</a:t>
+              <a:t>11/03/2026</a:t>
             </a:fld>
             <a:endParaRPr lang="it-IT"/>
           </a:p>
@@ -1863,7 +1893,7 @@
           <a:p>
             <a:fld id="{57D77E67-7B3D-4818-8C13-CD2889832A7C}" type="datetimeFigureOut">
               <a:rPr lang="it-IT" smtClean="0"/>
-              <a:t>04/11/2025</a:t>
+              <a:t>11/03/2026</a:t>
             </a:fld>
             <a:endParaRPr lang="it-IT"/>
           </a:p>
@@ -2004,7 +2034,7 @@
           <a:p>
             <a:fld id="{57D77E67-7B3D-4818-8C13-CD2889832A7C}" type="datetimeFigureOut">
               <a:rPr lang="it-IT" smtClean="0"/>
-              <a:t>04/11/2025</a:t>
+              <a:t>11/03/2026</a:t>
             </a:fld>
             <a:endParaRPr lang="it-IT"/>
           </a:p>
@@ -2117,7 +2147,7 @@
           <a:p>
             <a:fld id="{57D77E67-7B3D-4818-8C13-CD2889832A7C}" type="datetimeFigureOut">
               <a:rPr lang="it-IT" smtClean="0"/>
-              <a:t>04/11/2025</a:t>
+              <a:t>11/03/2026</a:t>
             </a:fld>
             <a:endParaRPr lang="it-IT"/>
           </a:p>
@@ -2428,7 +2458,7 @@
           <a:p>
             <a:fld id="{57D77E67-7B3D-4818-8C13-CD2889832A7C}" type="datetimeFigureOut">
               <a:rPr lang="it-IT" smtClean="0"/>
-              <a:t>04/11/2025</a:t>
+              <a:t>11/03/2026</a:t>
             </a:fld>
             <a:endParaRPr lang="it-IT"/>
           </a:p>
@@ -2716,7 +2746,7 @@
           <a:p>
             <a:fld id="{57D77E67-7B3D-4818-8C13-CD2889832A7C}" type="datetimeFigureOut">
               <a:rPr lang="it-IT" smtClean="0"/>
-              <a:t>04/11/2025</a:t>
+              <a:t>11/03/2026</a:t>
             </a:fld>
             <a:endParaRPr lang="it-IT"/>
           </a:p>
@@ -2957,7 +2987,7 @@
           <a:p>
             <a:fld id="{57D77E67-7B3D-4818-8C13-CD2889832A7C}" type="datetimeFigureOut">
               <a:rPr lang="it-IT" smtClean="0"/>
-              <a:t>04/11/2025</a:t>
+              <a:t>11/03/2026</a:t>
             </a:fld>
             <a:endParaRPr lang="it-IT"/>
           </a:p>
@@ -3424,6 +3454,127 @@
 </p:sld>
 </file>
 
+<file path=ppt/slides/slide2.xml><?xml version="1.0" encoding="utf-8"?>
+<p:sld xmlns:a="http://schemas.openxmlformats.org/drawingml/2006/main" xmlns:r="http://schemas.openxmlformats.org/officeDocument/2006/relationships" xmlns:p="http://schemas.openxmlformats.org/presentationml/2006/main">
+  <p:cSld>
+    <p:spTree>
+      <p:nvGrpSpPr>
+        <p:cNvPr id="1" name=""/>
+        <p:cNvGrpSpPr/>
+        <p:nvPr/>
+      </p:nvGrpSpPr>
+      <p:grpSpPr>
+        <a:xfrm>
+          <a:off x="0" y="0"/>
+          <a:ext cx="0" cy="0"/>
+          <a:chOff x="0" y="0"/>
+          <a:chExt cx="0" cy="0"/>
+        </a:xfrm>
+      </p:grpSpPr>
+      <p:sp>
+        <p:nvSpPr>
+          <p:cNvPr id="5" name="Rettangolo 4">
+            <a:extLst>
+              <a:ext uri="{FF2B5EF4-FFF2-40B4-BE49-F238E27FC236}">
+                <a16:creationId xmlns:a16="http://schemas.microsoft.com/office/drawing/2014/main" id="{DCC51DEA-F9EE-FE35-C59B-5F164BA123A3}"/>
+              </a:ext>
+            </a:extLst>
+          </p:cNvPr>
+          <p:cNvSpPr/>
+          <p:nvPr/>
+        </p:nvSpPr>
+        <p:spPr>
+          <a:xfrm>
+            <a:off x="2446020" y="2518410"/>
+            <a:ext cx="5836920" cy="1821180"/>
+          </a:xfrm>
+          <a:prstGeom prst="rect">
+            <a:avLst/>
+          </a:prstGeom>
+          <a:solidFill>
+            <a:schemeClr val="bg1"/>
+          </a:solidFill>
+          <a:ln>
+            <a:solidFill>
+              <a:schemeClr val="bg1"/>
+            </a:solidFill>
+          </a:ln>
+        </p:spPr>
+        <p:style>
+          <a:lnRef idx="2">
+            <a:schemeClr val="accent1">
+              <a:shade val="15000"/>
+            </a:schemeClr>
+          </a:lnRef>
+          <a:fillRef idx="1">
+            <a:schemeClr val="accent1"/>
+          </a:fillRef>
+          <a:effectRef idx="0">
+            <a:schemeClr val="accent1"/>
+          </a:effectRef>
+          <a:fontRef idx="minor">
+            <a:schemeClr val="lt1"/>
+          </a:fontRef>
+        </p:style>
+        <p:txBody>
+          <a:bodyPr rtlCol="0" anchor="ctr"/>
+          <a:lstStyle/>
+          <a:p>
+            <a:pPr algn="ctr"/>
+            <a:endParaRPr lang="en-GB"/>
+          </a:p>
+        </p:txBody>
+      </p:sp>
+      <p:pic>
+        <p:nvPicPr>
+          <p:cNvPr id="7" name="Immagine 6">
+            <a:extLst>
+              <a:ext uri="{FF2B5EF4-FFF2-40B4-BE49-F238E27FC236}">
+                <a16:creationId xmlns:a16="http://schemas.microsoft.com/office/drawing/2014/main" id="{CAEC6B87-E173-5689-A772-5C9288EBDFFF}"/>
+              </a:ext>
+            </a:extLst>
+          </p:cNvPr>
+          <p:cNvPicPr>
+            <a:picLocks noChangeAspect="1"/>
+          </p:cNvPicPr>
+          <p:nvPr/>
+        </p:nvPicPr>
+        <p:blipFill>
+          <a:blip r:embed="rId2">
+            <a:extLst>
+              <a:ext uri="{28A0092B-C50C-407E-A947-70E740481C1C}">
+                <a14:useLocalDpi xmlns:a14="http://schemas.microsoft.com/office/drawing/2010/main" val="0"/>
+              </a:ext>
+            </a:extLst>
+          </a:blip>
+          <a:srcRect t="24778" b="26222"/>
+          <a:stretch>
+            <a:fillRect/>
+          </a:stretch>
+        </p:blipFill>
+        <p:spPr>
+          <a:xfrm>
+            <a:off x="2560320" y="2655570"/>
+            <a:ext cx="5556898" cy="1531620"/>
+          </a:xfrm>
+          <a:prstGeom prst="rect">
+            <a:avLst/>
+          </a:prstGeom>
+        </p:spPr>
+      </p:pic>
+    </p:spTree>
+    <p:extLst>
+      <p:ext uri="{BB962C8B-B14F-4D97-AF65-F5344CB8AC3E}">
+        <p14:creationId xmlns:p14="http://schemas.microsoft.com/office/powerpoint/2010/main" val="3010427344"/>
+      </p:ext>
+    </p:extLst>
+  </p:cSld>
+  <p:clrMapOvr>
+    <a:masterClrMapping/>
+  </p:clrMapOvr>
+</p:sld>
+</file>
+
 <file path=ppt/theme/theme1.xml><?xml version="1.0" encoding="utf-8"?>
 <a:theme xmlns:a="http://schemas.openxmlformats.org/drawingml/2006/main" name="Tema di Office">
   <a:themeElements>
